--- a/downloads/DCT_V1_Ch04_Slides.pptx
+++ b/downloads/DCT_V1_Ch04_Slides.pptx
@@ -129,7 +129,7 @@
   <p:extLst>
     <p:ext uri="{521415D9-36F7-43E2-AB2F-B90AF26B5E84}">
       <p14:sectionLst xmlns:p14="http://schemas.microsoft.com/office/powerpoint/2010/main">
-        <p14:section name="Opening" id="{b57c055a-f163-01f4-3ace-f640b843d68a}">
+        <p14:section name="Opening" id="{4ddd2b37-c509-8010-9155-e09348fdf1dd}">
           <p14:sldIdLst>
             <p14:sldId id="256"/>
             <p14:sldId id="257"/>
@@ -137,41 +137,41 @@
             <p14:sldId id="259"/>
           </p14:sldIdLst>
         </p14:section>
-        <p14:section name="4.1 Enterprise Modeling Philosophy" id="{b80ab73d-2c28-bf61-913e-542ee33bb19a}">
+        <p14:section name="4.1 Enterprise Modeling Philosophy" id="{164fb21a-03f1-0cda-101e-efbee56878c6}">
           <p14:sldIdLst>
             <p14:sldId id="260"/>
           </p14:sldIdLst>
         </p14:section>
-        <p14:section name="4.2 Model Types and the Representation Bound" id="{b55ac5a5-e4df-b75f-6dfd-b89a0d686ac9}">
+        <p14:section name="4.2 Model Types and the Representation Bound" id="{0abfcef8-364b-c867-993b-531b8cdc1302}">
           <p14:sldIdLst>
             <p14:sldId id="261"/>
             <p14:sldId id="262"/>
           </p14:sldIdLst>
         </p14:section>
-        <p14:section name="4.3 Abstraction and Decomposition" id="{cb97b030-ecb7-d497-87c0-8c8d668eec40}">
+        <p14:section name="4.3 Abstraction and Decomposition" id="{ef25d49a-8342-0781-e7c8-488813589562}">
           <p14:sldIdLst>
             <p14:sldId id="263"/>
           </p14:sldIdLst>
         </p14:section>
-        <p14:section name="4.4 Aggregation and Hierarchies" id="{ec8e189a-e345-47b7-0872-e7f3576ce1ed}">
+        <p14:section name="4.4 Aggregation and Hierarchies" id="{32c3df89-4443-4a8a-f82a-bf9b72c8c6ce}">
           <p14:sldIdLst>
             <p14:sldId id="264"/>
             <p14:sldId id="265"/>
           </p14:sldIdLst>
         </p14:section>
-        <p14:section name="4.5 Measurement, Validation, and Verification" id="{4094bd39-31cf-0ba0-7f4a-a88fb1b27a31}">
+        <p14:section name="4.5 Measurement, Validation, and Verification" id="{7f72d4ae-4979-1d1d-747e-838126bf466e}">
           <p14:sldIdLst>
             <p14:sldId id="266"/>
             <p14:sldId id="267"/>
             <p14:sldId id="268"/>
           </p14:sldIdLst>
         </p14:section>
-        <p14:section name="4.6 The Model Lifecycle" id="{ad5ef6dd-cb94-af3c-f5cf-9781de09bc34}">
+        <p14:section name="4.6 The Model Lifecycle" id="{661b6391-21a1-046f-f372-01d0cc5a20c3}">
           <p14:sldIdLst>
             <p14:sldId id="269"/>
           </p14:sldIdLst>
         </p14:section>
-        <p14:section name="Worked Example 4.1" id="{0bd83073-1911-21ee-1184-658f74c9bf81}">
+        <p14:section name="Worked Example 4.1" id="{9722c075-7802-1696-a058-6ed410233e5f}">
           <p14:sldIdLst>
             <p14:sldId id="270"/>
             <p14:sldId id="271"/>
@@ -180,12 +180,12 @@
             <p14:sldId id="274"/>
           </p14:sldIdLst>
         </p14:section>
-        <p14:section name="AXIOM Lab 1.4" id="{a0d310b6-e215-5cc9-dac8-260833a202ae}">
+        <p14:section name="AXIOM Lab 1.4" id="{ec4ee4a2-5562-639c-8656-040a72dea8fb}">
           <p14:sldIdLst>
             <p14:sldId id="275"/>
           </p14:sldIdLst>
         </p14:section>
-        <p14:section name="Close" id="{7a231e8a-70ff-2b9c-73f7-40da9b30823a}">
+        <p14:section name="Close" id="{b1d03b9a-2a7d-650f-7350-15b4eab55665}">
           <p14:sldIdLst>
             <p14:sldId id="276"/>
             <p14:sldId id="277"/>

--- a/downloads/DCT_V1_Ch04_Slides.pptx
+++ b/downloads/DCT_V1_Ch04_Slides.pptx
@@ -129,7 +129,7 @@
   <p:extLst>
     <p:ext uri="{521415D9-36F7-43E2-AB2F-B90AF26B5E84}">
       <p14:sectionLst xmlns:p14="http://schemas.microsoft.com/office/powerpoint/2010/main">
-        <p14:section name="Opening" id="{4ddd2b37-c509-8010-9155-e09348fdf1dd}">
+        <p14:section name="Opening" id="{df1c8efc-2dc2-0c7a-1b7c-925467fca43e}">
           <p14:sldIdLst>
             <p14:sldId id="256"/>
             <p14:sldId id="257"/>
@@ -137,41 +137,41 @@
             <p14:sldId id="259"/>
           </p14:sldIdLst>
         </p14:section>
-        <p14:section name="4.1 Enterprise Modeling Philosophy" id="{164fb21a-03f1-0cda-101e-efbee56878c6}">
+        <p14:section name="4.1 Enterprise Modeling Philosophy" id="{a8505f17-77eb-6f9c-782d-be09f9d2b0ee}">
           <p14:sldIdLst>
             <p14:sldId id="260"/>
           </p14:sldIdLst>
         </p14:section>
-        <p14:section name="4.2 Model Types and the Representation Bound" id="{0abfcef8-364b-c867-993b-531b8cdc1302}">
+        <p14:section name="4.2 Model Types and the Representation Bound" id="{4348aef3-441e-8dfa-dd18-2433eb59bc9a}">
           <p14:sldIdLst>
             <p14:sldId id="261"/>
             <p14:sldId id="262"/>
           </p14:sldIdLst>
         </p14:section>
-        <p14:section name="4.3 Abstraction and Decomposition" id="{ef25d49a-8342-0781-e7c8-488813589562}">
+        <p14:section name="4.3 Abstraction and Decomposition" id="{0489def6-7224-28bd-cdbd-6c2991c7a71f}">
           <p14:sldIdLst>
             <p14:sldId id="263"/>
           </p14:sldIdLst>
         </p14:section>
-        <p14:section name="4.4 Aggregation and Hierarchies" id="{32c3df89-4443-4a8a-f82a-bf9b72c8c6ce}">
+        <p14:section name="4.4 Aggregation and Hierarchies" id="{37a3df0c-e103-0eeb-96e2-d3d1f478e6bc}">
           <p14:sldIdLst>
             <p14:sldId id="264"/>
             <p14:sldId id="265"/>
           </p14:sldIdLst>
         </p14:section>
-        <p14:section name="4.5 Measurement, Validation, and Verification" id="{7f72d4ae-4979-1d1d-747e-838126bf466e}">
+        <p14:section name="4.5 Measurement, Validation, and Verification" id="{9bf90e3e-0258-95fd-c694-04db735c8208}">
           <p14:sldIdLst>
             <p14:sldId id="266"/>
             <p14:sldId id="267"/>
             <p14:sldId id="268"/>
           </p14:sldIdLst>
         </p14:section>
-        <p14:section name="4.6 The Model Lifecycle" id="{661b6391-21a1-046f-f372-01d0cc5a20c3}">
+        <p14:section name="4.6 The Model Lifecycle" id="{7585d518-d388-ec88-0d21-2f79dfce9889}">
           <p14:sldIdLst>
             <p14:sldId id="269"/>
           </p14:sldIdLst>
         </p14:section>
-        <p14:section name="Worked Example 4.1" id="{9722c075-7802-1696-a058-6ed410233e5f}">
+        <p14:section name="Worked Example 4.1" id="{47f7c175-50f0-9ec9-a26a-74264e39bf78}">
           <p14:sldIdLst>
             <p14:sldId id="270"/>
             <p14:sldId id="271"/>
@@ -180,12 +180,12 @@
             <p14:sldId id="274"/>
           </p14:sldIdLst>
         </p14:section>
-        <p14:section name="AXIOM Lab 1.4" id="{ec4ee4a2-5562-639c-8656-040a72dea8fb}">
+        <p14:section name="AXIOM Lab 1.4" id="{1c483cf6-54e2-f059-164f-9bed2dd147be}">
           <p14:sldIdLst>
             <p14:sldId id="275"/>
           </p14:sldIdLst>
         </p14:section>
-        <p14:section name="Close" id="{b1d03b9a-2a7d-650f-7350-15b4eab55665}">
+        <p14:section name="Close" id="{db1616a3-7986-c5b1-0894-ae7a4178a704}">
           <p14:sldIdLst>
             <p14:sldId id="276"/>
             <p14:sldId id="277"/>
